--- a/assets/pptx/catalog-35.pptx
+++ b/assets/pptx/catalog-35.pptx
@@ -3245,7 +3245,7 @@
                 <a:ea typeface="Ebrima"/>
                 <a:cs typeface="Ebrima"/>
               </a:rPr>
-              <a:t>በክርስቶስ ኢየሱስ (3x)</a:t>
+              <a:t>በክርስቶስ ኢየሱስ 3x</a:t>
             </a:r>
           </a:p>
           <a:p>
@@ -3263,7 +3263,7 @@
                 <a:ea typeface="Ebrima"/>
                 <a:cs typeface="Ebrima"/>
               </a:rPr>
-              <a:t>ተወለድኩ ከመንፈስ (3x)</a:t>
+              <a:t>ተወለድኩ ከመንፈስ 3x</a:t>
             </a:r>
           </a:p>
           <a:p>
@@ -3281,7 +3281,7 @@
                 <a:ea typeface="Ebrima"/>
                 <a:cs typeface="Ebrima"/>
               </a:rPr>
-              <a:t>ዳግም ዉልደት አግኝቻለው (3x)</a:t>
+              <a:t>ዳግም ዉልደት አግኝቻለው 3x</a:t>
             </a:r>
           </a:p>
         </p:txBody>
@@ -3469,7 +3469,7 @@
                 <a:ea typeface="Ebrima"/>
                 <a:cs typeface="Ebrima"/>
               </a:rPr>
-              <a:t>አነሱ ምድር ሰማይ (3x)</a:t>
+              <a:t>አነሱ ምድር ሰማይ 3x</a:t>
             </a:r>
           </a:p>
           <a:p>
@@ -3487,7 +3487,7 @@
                 <a:ea typeface="Ebrima"/>
                 <a:cs typeface="Ebrima"/>
               </a:rPr>
-              <a:t>እርስቴን እግዚአብሔርን ሳይ (3x)</a:t>
+              <a:t>እርስቴን እግዚአብሔርን ሳይ 3x</a:t>
             </a:r>
           </a:p>
           <a:p>
@@ -3505,7 +3505,7 @@
                 <a:ea typeface="Ebrima"/>
                 <a:cs typeface="Ebrima"/>
               </a:rPr>
-              <a:t>ፈልጌያቸው አጣኋቸው (2x)</a:t>
+              <a:t>ፈልጌያቸው አጣኋቸው 2x</a:t>
             </a:r>
           </a:p>
           <a:p>
@@ -3693,7 +3693,7 @@
                 <a:ea typeface="Ebrima"/>
                 <a:cs typeface="Ebrima"/>
               </a:rPr>
-              <a:t>አነሱ ምድር ሰማይ (3x)</a:t>
+              <a:t>አነሱ ምድር ሰማይ 3x</a:t>
             </a:r>
           </a:p>
           <a:p>
@@ -3711,7 +3711,7 @@
                 <a:ea typeface="Ebrima"/>
                 <a:cs typeface="Ebrima"/>
               </a:rPr>
-              <a:t>እርስቴን እግዚአብሔርን ሳይ (3x)</a:t>
+              <a:t>እርስቴን እግዚአብሔርን ሳይ 3x</a:t>
             </a:r>
           </a:p>
           <a:p>
@@ -3729,7 +3729,7 @@
                 <a:ea typeface="Ebrima"/>
                 <a:cs typeface="Ebrima"/>
               </a:rPr>
-              <a:t>ፈልጌያቸው አጣኋቸው (2x)</a:t>
+              <a:t>ፈልጌያቸው አጣኋቸው 2x</a:t>
             </a:r>
           </a:p>
           <a:p>
